--- a/Презентация ООАП (5).pptx
+++ b/Презентация ООАП (5).pptx
@@ -20,7 +20,10 @@
     <p:sldId id="271" r:id="rId14"/>
     <p:sldId id="268" r:id="rId15"/>
     <p:sldId id="269" r:id="rId16"/>
-    <p:sldId id="264" r:id="rId17"/>
+    <p:sldId id="274" r:id="rId17"/>
+    <p:sldId id="275" r:id="rId18"/>
+    <p:sldId id="276" r:id="rId19"/>
+    <p:sldId id="264" r:id="rId20"/>
   </p:sldIdLst>
   <p:sldSz cx="12192000" cy="6858000"/>
   <p:notesSz cx="6858000" cy="9144000"/>
@@ -1345,7 +1348,7 @@
           <a:p>
             <a:fld id="{D3D22832-4BA6-4D93-84B4-2F37F4F97A19}" type="datetimeFigureOut">
               <a:rPr lang="ru-RU" smtClean="0"/>
-              <a:t>01.12.2025</a:t>
+              <a:t>03.12.2025</a:t>
             </a:fld>
             <a:endParaRPr lang="ru-RU"/>
           </a:p>
@@ -1590,7 +1593,7 @@
           <a:p>
             <a:fld id="{D3D22832-4BA6-4D93-84B4-2F37F4F97A19}" type="datetimeFigureOut">
               <a:rPr lang="ru-RU" smtClean="0"/>
-              <a:t>01.12.2025</a:t>
+              <a:t>03.12.2025</a:t>
             </a:fld>
             <a:endParaRPr lang="ru-RU"/>
           </a:p>
@@ -1770,7 +1773,7 @@
           <a:p>
             <a:fld id="{D3D22832-4BA6-4D93-84B4-2F37F4F97A19}" type="datetimeFigureOut">
               <a:rPr lang="ru-RU" smtClean="0"/>
-              <a:t>01.12.2025</a:t>
+              <a:t>03.12.2025</a:t>
             </a:fld>
             <a:endParaRPr lang="ru-RU"/>
           </a:p>
@@ -1940,7 +1943,7 @@
           <a:p>
             <a:fld id="{D3D22832-4BA6-4D93-84B4-2F37F4F97A19}" type="datetimeFigureOut">
               <a:rPr lang="ru-RU" smtClean="0"/>
-              <a:t>01.12.2025</a:t>
+              <a:t>03.12.2025</a:t>
             </a:fld>
             <a:endParaRPr lang="ru-RU"/>
           </a:p>
@@ -2216,7 +2219,7 @@
           <a:p>
             <a:fld id="{D3D22832-4BA6-4D93-84B4-2F37F4F97A19}" type="datetimeFigureOut">
               <a:rPr lang="ru-RU" smtClean="0"/>
-              <a:t>01.12.2025</a:t>
+              <a:t>03.12.2025</a:t>
             </a:fld>
             <a:endParaRPr lang="ru-RU"/>
           </a:p>
@@ -3417,7 +3420,7 @@
           <a:p>
             <a:fld id="{D3D22832-4BA6-4D93-84B4-2F37F4F97A19}" type="datetimeFigureOut">
               <a:rPr lang="ru-RU" smtClean="0"/>
-              <a:t>01.12.2025</a:t>
+              <a:t>03.12.2025</a:t>
             </a:fld>
             <a:endParaRPr lang="ru-RU"/>
           </a:p>
@@ -3807,7 +3810,7 @@
           <a:p>
             <a:fld id="{D3D22832-4BA6-4D93-84B4-2F37F4F97A19}" type="datetimeFigureOut">
               <a:rPr lang="ru-RU" smtClean="0"/>
-              <a:t>01.12.2025</a:t>
+              <a:t>03.12.2025</a:t>
             </a:fld>
             <a:endParaRPr lang="ru-RU"/>
           </a:p>
@@ -3930,7 +3933,7 @@
           <a:p>
             <a:fld id="{D3D22832-4BA6-4D93-84B4-2F37F4F97A19}" type="datetimeFigureOut">
               <a:rPr lang="ru-RU" smtClean="0"/>
-              <a:t>01.12.2025</a:t>
+              <a:t>03.12.2025</a:t>
             </a:fld>
             <a:endParaRPr lang="ru-RU"/>
           </a:p>
@@ -4025,7 +4028,7 @@
           <a:p>
             <a:fld id="{D3D22832-4BA6-4D93-84B4-2F37F4F97A19}" type="datetimeFigureOut">
               <a:rPr lang="ru-RU" smtClean="0"/>
-              <a:t>01.12.2025</a:t>
+              <a:t>03.12.2025</a:t>
             </a:fld>
             <a:endParaRPr lang="ru-RU"/>
           </a:p>
@@ -4788,7 +4791,7 @@
           <a:p>
             <a:fld id="{D3D22832-4BA6-4D93-84B4-2F37F4F97A19}" type="datetimeFigureOut">
               <a:rPr lang="ru-RU" smtClean="0"/>
-              <a:t>01.12.2025</a:t>
+              <a:t>03.12.2025</a:t>
             </a:fld>
             <a:endParaRPr lang="ru-RU"/>
           </a:p>
@@ -5628,7 +5631,7 @@
           <a:p>
             <a:fld id="{D3D22832-4BA6-4D93-84B4-2F37F4F97A19}" type="datetimeFigureOut">
               <a:rPr lang="ru-RU" smtClean="0"/>
-              <a:t>01.12.2025</a:t>
+              <a:t>03.12.2025</a:t>
             </a:fld>
             <a:endParaRPr lang="ru-RU"/>
           </a:p>
@@ -5855,7 +5858,7 @@
           <a:p>
             <a:fld id="{D3D22832-4BA6-4D93-84B4-2F37F4F97A19}" type="datetimeFigureOut">
               <a:rPr lang="ru-RU" smtClean="0"/>
-              <a:t>01.12.2025</a:t>
+              <a:t>03.12.2025</a:t>
             </a:fld>
             <a:endParaRPr lang="ru-RU"/>
           </a:p>
@@ -7429,7 +7432,7 @@
         </p:blipFill>
         <p:spPr>
           <a:xfrm>
-            <a:off x="1485256" y="1171260"/>
+            <a:off x="1799888" y="1456395"/>
             <a:ext cx="9221487" cy="4515480"/>
           </a:xfrm>
           <a:prstGeom prst="rect">
@@ -7479,8 +7482,8 @@
         </p:nvSpPr>
         <p:spPr>
           <a:xfrm>
-            <a:off x="1232013" y="673174"/>
-            <a:ext cx="10178322" cy="605167"/>
+            <a:off x="365431" y="2703080"/>
+            <a:ext cx="4165897" cy="1137792"/>
           </a:xfrm>
         </p:spPr>
         <p:txBody>
@@ -7511,7 +7514,7 @@
         </p:nvSpPr>
         <p:spPr>
           <a:xfrm>
-            <a:off x="1111045" y="88490"/>
+            <a:off x="962593" y="388373"/>
             <a:ext cx="4424516" cy="538609"/>
           </a:xfrm>
           <a:prstGeom prst="rect">
@@ -7537,34 +7540,9 @@
           </a:p>
         </p:txBody>
       </p:sp>
-      <p:sp>
-        <p:nvSpPr>
-          <p:cNvPr id="5" name="Объект 4">
-            <a:extLst>
-              <a:ext uri="{FF2B5EF4-FFF2-40B4-BE49-F238E27FC236}">
-                <a16:creationId xmlns:a16="http://schemas.microsoft.com/office/drawing/2014/main" id="{E57CFB84-1808-E45B-EABE-DC0BDE4AA3D9}"/>
-              </a:ext>
-            </a:extLst>
-          </p:cNvPr>
-          <p:cNvSpPr>
-            <a:spLocks noGrp="1"/>
-          </p:cNvSpPr>
-          <p:nvPr>
-            <p:ph idx="1"/>
-          </p:nvPr>
-        </p:nvSpPr>
-        <p:spPr/>
-        <p:txBody>
-          <a:bodyPr/>
-          <a:lstStyle/>
-          <a:p>
-            <a:endParaRPr lang="ru-RU"/>
-          </a:p>
-        </p:txBody>
-      </p:sp>
       <p:pic>
         <p:nvPicPr>
-          <p:cNvPr id="7" name="Рисунок 6">
+          <p:cNvPr id="4" name="Рисунок 3">
             <a:extLst>
               <a:ext uri="{FF2B5EF4-FFF2-40B4-BE49-F238E27FC236}">
                 <a16:creationId xmlns:a16="http://schemas.microsoft.com/office/drawing/2014/main" id="{390416AC-F0B0-8D5B-D438-297C37074460}"/>
@@ -7584,8 +7562,8 @@
         </p:blipFill>
         <p:spPr>
           <a:xfrm>
-            <a:off x="1992449" y="1426259"/>
-            <a:ext cx="8207101" cy="5004692"/>
+            <a:off x="4227871" y="176982"/>
+            <a:ext cx="7529872" cy="6577780"/>
           </a:xfrm>
           <a:prstGeom prst="rect">
             <a:avLst/>
@@ -7634,7 +7612,7 @@
         </p:nvSpPr>
         <p:spPr>
           <a:xfrm>
-            <a:off x="1251678" y="482969"/>
+            <a:off x="1222182" y="173195"/>
             <a:ext cx="10178322" cy="605167"/>
           </a:xfrm>
         </p:spPr>
@@ -7654,35 +7632,50 @@
       </p:sp>
       <p:sp>
         <p:nvSpPr>
-          <p:cNvPr id="4" name="Объект 3">
+          <p:cNvPr id="11" name="TextBox 10">
             <a:extLst>
               <a:ext uri="{FF2B5EF4-FFF2-40B4-BE49-F238E27FC236}">
-                <a16:creationId xmlns:a16="http://schemas.microsoft.com/office/drawing/2014/main" id="{620B0C83-B031-3BAA-C448-7E6351767F23}"/>
+                <a16:creationId xmlns:a16="http://schemas.microsoft.com/office/drawing/2014/main" id="{141F2718-722E-65DC-15C9-B9667C1C6EBA}"/>
               </a:ext>
             </a:extLst>
           </p:cNvPr>
-          <p:cNvSpPr>
-            <a:spLocks noGrp="1"/>
-          </p:cNvSpPr>
-          <p:nvPr>
-            <p:ph idx="1"/>
-          </p:nvPr>
-        </p:nvSpPr>
-        <p:spPr/>
-        <p:txBody>
-          <a:bodyPr/>
+          <p:cNvSpPr txBox="1"/>
+          <p:nvPr/>
+        </p:nvSpPr>
+        <p:spPr>
+          <a:xfrm>
+            <a:off x="1662494" y="857020"/>
+            <a:ext cx="3569110" cy="538609"/>
+          </a:xfrm>
+          <a:prstGeom prst="rect">
+            <a:avLst/>
+          </a:prstGeom>
+          <a:noFill/>
+        </p:spPr>
+        <p:txBody>
+          <a:bodyPr wrap="square" rtlCol="0">
+            <a:spAutoFit/>
+          </a:bodyPr>
           <a:lstStyle/>
           <a:p>
-            <a:endParaRPr lang="ru-RU" dirty="0"/>
+            <a:r>
+              <a:rPr lang="ru-RU" sz="2900" dirty="0">
+                <a:solidFill>
+                  <a:schemeClr val="tx2"/>
+                </a:solidFill>
+                <a:latin typeface="+mj-lt"/>
+              </a:rPr>
+              <a:t>СОСТОЯНИЕ ПАЦИЕНТА</a:t>
+            </a:r>
           </a:p>
         </p:txBody>
       </p:sp>
       <p:pic>
         <p:nvPicPr>
-          <p:cNvPr id="8" name="Рисунок 7">
+          <p:cNvPr id="4" name="Рисунок 3">
             <a:extLst>
               <a:ext uri="{FF2B5EF4-FFF2-40B4-BE49-F238E27FC236}">
-                <a16:creationId xmlns:a16="http://schemas.microsoft.com/office/drawing/2014/main" id="{F143FEDF-2D31-F7E8-F239-2018891CEE8F}"/>
+                <a16:creationId xmlns:a16="http://schemas.microsoft.com/office/drawing/2014/main" id="{030E7F7F-7DDC-2C4F-1371-CD511C99414C}"/>
               </a:ext>
             </a:extLst>
           </p:cNvPr>
@@ -7699,38 +7692,8 @@
         </p:blipFill>
         <p:spPr>
           <a:xfrm>
-            <a:off x="998820" y="1981102"/>
-            <a:ext cx="7034417" cy="3365877"/>
-          </a:xfrm>
-          <a:prstGeom prst="rect">
-            <a:avLst/>
-          </a:prstGeom>
-        </p:spPr>
-      </p:pic>
-      <p:pic>
-        <p:nvPicPr>
-          <p:cNvPr id="10" name="Рисунок 9">
-            <a:extLst>
-              <a:ext uri="{FF2B5EF4-FFF2-40B4-BE49-F238E27FC236}">
-                <a16:creationId xmlns:a16="http://schemas.microsoft.com/office/drawing/2014/main" id="{88664A3D-57F3-C3DA-F84C-BBD772C42F10}"/>
-              </a:ext>
-            </a:extLst>
-          </p:cNvPr>
-          <p:cNvPicPr>
-            <a:picLocks noChangeAspect="1"/>
-          </p:cNvPicPr>
-          <p:nvPr/>
-        </p:nvPicPr>
-        <p:blipFill>
-          <a:blip r:embed="rId3"/>
-          <a:stretch>
-            <a:fillRect/>
-          </a:stretch>
-        </p:blipFill>
-        <p:spPr>
-          <a:xfrm>
-            <a:off x="8126172" y="1189276"/>
-            <a:ext cx="3556686" cy="4949528"/>
+            <a:off x="1662494" y="1395629"/>
+            <a:ext cx="9297698" cy="5210902"/>
           </a:xfrm>
           <a:prstGeom prst="rect">
             <a:avLst/>
@@ -7755,6 +7718,148 @@
   <p:cSld>
     <p:spTree>
       <p:nvGrpSpPr>
+        <p:cNvPr id="1" name="">
+          <a:extLst>
+            <a:ext uri="{FF2B5EF4-FFF2-40B4-BE49-F238E27FC236}">
+              <a16:creationId xmlns:a16="http://schemas.microsoft.com/office/drawing/2014/main" id="{06951D91-FF38-A1A3-C930-0860DA794CFB}"/>
+            </a:ext>
+          </a:extLst>
+        </p:cNvPr>
+        <p:cNvGrpSpPr/>
+        <p:nvPr/>
+      </p:nvGrpSpPr>
+      <p:grpSpPr>
+        <a:xfrm>
+          <a:off x="0" y="0"/>
+          <a:ext cx="0" cy="0"/>
+          <a:chOff x="0" y="0"/>
+          <a:chExt cx="0" cy="0"/>
+        </a:xfrm>
+      </p:grpSpPr>
+      <p:sp>
+        <p:nvSpPr>
+          <p:cNvPr id="2" name="Заголовок 1">
+            <a:extLst>
+              <a:ext uri="{FF2B5EF4-FFF2-40B4-BE49-F238E27FC236}">
+                <a16:creationId xmlns:a16="http://schemas.microsoft.com/office/drawing/2014/main" id="{DAADB006-4859-9635-16CE-FD2511E4F2FB}"/>
+              </a:ext>
+            </a:extLst>
+          </p:cNvPr>
+          <p:cNvSpPr>
+            <a:spLocks noGrp="1"/>
+          </p:cNvSpPr>
+          <p:nvPr>
+            <p:ph type="title"/>
+          </p:nvPr>
+        </p:nvSpPr>
+        <p:spPr>
+          <a:xfrm>
+            <a:off x="1251678" y="178169"/>
+            <a:ext cx="10178322" cy="605167"/>
+          </a:xfrm>
+        </p:spPr>
+        <p:txBody>
+          <a:bodyPr>
+            <a:normAutofit/>
+          </a:bodyPr>
+          <a:lstStyle/>
+          <a:p>
+            <a:pPr algn="ctr"/>
+            <a:r>
+              <a:rPr lang="ru-RU" sz="3200" dirty="0"/>
+              <a:t>Диаграммы Состояний</a:t>
+            </a:r>
+          </a:p>
+        </p:txBody>
+      </p:sp>
+      <p:sp>
+        <p:nvSpPr>
+          <p:cNvPr id="8" name="TextBox 7">
+            <a:extLst>
+              <a:ext uri="{FF2B5EF4-FFF2-40B4-BE49-F238E27FC236}">
+                <a16:creationId xmlns:a16="http://schemas.microsoft.com/office/drawing/2014/main" id="{C79580CA-D307-B484-623C-131B849FFA98}"/>
+              </a:ext>
+            </a:extLst>
+          </p:cNvPr>
+          <p:cNvSpPr txBox="1"/>
+          <p:nvPr/>
+        </p:nvSpPr>
+        <p:spPr>
+          <a:xfrm>
+            <a:off x="1106917" y="1337182"/>
+            <a:ext cx="3569110" cy="538609"/>
+          </a:xfrm>
+          <a:prstGeom prst="rect">
+            <a:avLst/>
+          </a:prstGeom>
+          <a:noFill/>
+        </p:spPr>
+        <p:txBody>
+          <a:bodyPr wrap="square" rtlCol="0">
+            <a:spAutoFit/>
+          </a:bodyPr>
+          <a:lstStyle/>
+          <a:p>
+            <a:r>
+              <a:rPr lang="ru-RU" sz="2900" dirty="0">
+                <a:solidFill>
+                  <a:schemeClr val="tx2"/>
+                </a:solidFill>
+                <a:latin typeface="+mj-lt"/>
+              </a:rPr>
+              <a:t>СОСТОЯНИЕ БРЕКЕТОВ</a:t>
+            </a:r>
+          </a:p>
+        </p:txBody>
+      </p:sp>
+      <p:pic>
+        <p:nvPicPr>
+          <p:cNvPr id="4" name="Рисунок 3">
+            <a:extLst>
+              <a:ext uri="{FF2B5EF4-FFF2-40B4-BE49-F238E27FC236}">
+                <a16:creationId xmlns:a16="http://schemas.microsoft.com/office/drawing/2014/main" id="{CE8F98FF-BC95-240E-0589-E26B18F73783}"/>
+              </a:ext>
+            </a:extLst>
+          </p:cNvPr>
+          <p:cNvPicPr>
+            <a:picLocks noChangeAspect="1"/>
+          </p:cNvPicPr>
+          <p:nvPr/>
+        </p:nvPicPr>
+        <p:blipFill>
+          <a:blip r:embed="rId2"/>
+          <a:stretch>
+            <a:fillRect/>
+          </a:stretch>
+        </p:blipFill>
+        <p:spPr>
+          <a:xfrm>
+            <a:off x="1106917" y="1875792"/>
+            <a:ext cx="10385019" cy="4013732"/>
+          </a:xfrm>
+          <a:prstGeom prst="rect">
+            <a:avLst/>
+          </a:prstGeom>
+        </p:spPr>
+      </p:pic>
+    </p:spTree>
+    <p:extLst>
+      <p:ext uri="{BB962C8B-B14F-4D97-AF65-F5344CB8AC3E}">
+        <p14:creationId xmlns:p14="http://schemas.microsoft.com/office/powerpoint/2010/main" val="492198585"/>
+      </p:ext>
+    </p:extLst>
+  </p:cSld>
+  <p:clrMapOvr>
+    <a:masterClrMapping/>
+  </p:clrMapOvr>
+</p:sld>
+</file>
+
+<file path=ppt/slides/slide17.xml><?xml version="1.0" encoding="utf-8"?>
+<p:sld xmlns:a="http://schemas.openxmlformats.org/drawingml/2006/main" xmlns:r="http://schemas.openxmlformats.org/officeDocument/2006/relationships" xmlns:p="http://schemas.openxmlformats.org/presentationml/2006/main">
+  <p:cSld>
+    <p:spTree>
+      <p:nvGrpSpPr>
         <p:cNvPr id="1" name=""/>
         <p:cNvGrpSpPr/>
         <p:nvPr/>
@@ -7767,6 +7872,253 @@
           <a:chExt cx="0" cy="0"/>
         </a:xfrm>
       </p:grpSpPr>
+      <p:pic>
+        <p:nvPicPr>
+          <p:cNvPr id="9" name="Рисунок 8">
+            <a:extLst>
+              <a:ext uri="{FF2B5EF4-FFF2-40B4-BE49-F238E27FC236}">
+                <a16:creationId xmlns:a16="http://schemas.microsoft.com/office/drawing/2014/main" id="{E56BE51C-2CFE-0260-EB8A-D1ABD6D8EABC}"/>
+              </a:ext>
+            </a:extLst>
+          </p:cNvPr>
+          <p:cNvPicPr>
+            <a:picLocks noChangeAspect="1"/>
+          </p:cNvPicPr>
+          <p:nvPr/>
+        </p:nvPicPr>
+        <p:blipFill>
+          <a:blip r:embed="rId2">
+            <a:extLst>
+              <a:ext uri="{28A0092B-C50C-407E-A947-70E740481C1C}">
+                <a14:useLocalDpi xmlns:a14="http://schemas.microsoft.com/office/drawing/2010/main" val="0"/>
+              </a:ext>
+            </a:extLst>
+          </a:blip>
+          <a:stretch>
+            <a:fillRect/>
+          </a:stretch>
+        </p:blipFill>
+        <p:spPr>
+          <a:xfrm>
+            <a:off x="4640116" y="0"/>
+            <a:ext cx="6706310" cy="6858000"/>
+          </a:xfrm>
+          <a:prstGeom prst="rect">
+            <a:avLst/>
+          </a:prstGeom>
+        </p:spPr>
+      </p:pic>
+      <p:sp>
+        <p:nvSpPr>
+          <p:cNvPr id="10" name="TextBox 9">
+            <a:extLst>
+              <a:ext uri="{FF2B5EF4-FFF2-40B4-BE49-F238E27FC236}">
+                <a16:creationId xmlns:a16="http://schemas.microsoft.com/office/drawing/2014/main" id="{A8290F60-4382-AFD9-5913-D3B2338C4B27}"/>
+              </a:ext>
+            </a:extLst>
+          </p:cNvPr>
+          <p:cNvSpPr txBox="1"/>
+          <p:nvPr/>
+        </p:nvSpPr>
+        <p:spPr>
+          <a:xfrm>
+            <a:off x="1032387" y="2598003"/>
+            <a:ext cx="4680156" cy="830997"/>
+          </a:xfrm>
+          <a:prstGeom prst="rect">
+            <a:avLst/>
+          </a:prstGeom>
+          <a:noFill/>
+        </p:spPr>
+        <p:txBody>
+          <a:bodyPr wrap="square" rtlCol="0">
+            <a:spAutoFit/>
+          </a:bodyPr>
+          <a:lstStyle/>
+          <a:p>
+            <a:r>
+              <a:rPr lang="ru-RU" sz="4800" dirty="0">
+                <a:solidFill>
+                  <a:schemeClr val="tx2"/>
+                </a:solidFill>
+                <a:latin typeface="+mj-lt"/>
+              </a:rPr>
+              <a:t>ЕСТЬ ВОПРОСЫ?</a:t>
+            </a:r>
+          </a:p>
+        </p:txBody>
+      </p:sp>
+    </p:spTree>
+    <p:extLst>
+      <p:ext uri="{BB962C8B-B14F-4D97-AF65-F5344CB8AC3E}">
+        <p14:creationId xmlns:p14="http://schemas.microsoft.com/office/powerpoint/2010/main" val="909185541"/>
+      </p:ext>
+    </p:extLst>
+  </p:cSld>
+  <p:clrMapOvr>
+    <a:masterClrMapping/>
+  </p:clrMapOvr>
+</p:sld>
+</file>
+
+<file path=ppt/slides/slide18.xml><?xml version="1.0" encoding="utf-8"?>
+<p:sld xmlns:a="http://schemas.openxmlformats.org/drawingml/2006/main" xmlns:r="http://schemas.openxmlformats.org/officeDocument/2006/relationships" xmlns:p="http://schemas.openxmlformats.org/presentationml/2006/main">
+  <p:cSld>
+    <p:spTree>
+      <p:nvGrpSpPr>
+        <p:cNvPr id="1" name=""/>
+        <p:cNvGrpSpPr/>
+        <p:nvPr/>
+      </p:nvGrpSpPr>
+      <p:grpSpPr>
+        <a:xfrm>
+          <a:off x="0" y="0"/>
+          <a:ext cx="0" cy="0"/>
+          <a:chOff x="0" y="0"/>
+          <a:chExt cx="0" cy="0"/>
+        </a:xfrm>
+      </p:grpSpPr>
+      <p:sp>
+        <p:nvSpPr>
+          <p:cNvPr id="2" name="Заголовок 1">
+            <a:extLst>
+              <a:ext uri="{FF2B5EF4-FFF2-40B4-BE49-F238E27FC236}">
+                <a16:creationId xmlns:a16="http://schemas.microsoft.com/office/drawing/2014/main" id="{2A3210E5-CFB4-9718-A360-D3EB5958BB09}"/>
+              </a:ext>
+            </a:extLst>
+          </p:cNvPr>
+          <p:cNvSpPr>
+            <a:spLocks noGrp="1"/>
+          </p:cNvSpPr>
+          <p:nvPr>
+            <p:ph type="title"/>
+          </p:nvPr>
+        </p:nvSpPr>
+        <p:spPr>
+          <a:xfrm>
+            <a:off x="2467452" y="145737"/>
+            <a:ext cx="3296788" cy="538609"/>
+          </a:xfrm>
+        </p:spPr>
+        <p:txBody>
+          <a:bodyPr>
+            <a:normAutofit/>
+          </a:bodyPr>
+          <a:lstStyle/>
+          <a:p>
+            <a:r>
+              <a:rPr lang="ru-RU" sz="2900" dirty="0"/>
+              <a:t>ВАШИ ВОПРОСЫ</a:t>
+            </a:r>
+          </a:p>
+        </p:txBody>
+      </p:sp>
+      <p:pic>
+        <p:nvPicPr>
+          <p:cNvPr id="5" name="Рисунок 4">
+            <a:extLst>
+              <a:ext uri="{FF2B5EF4-FFF2-40B4-BE49-F238E27FC236}">
+                <a16:creationId xmlns:a16="http://schemas.microsoft.com/office/drawing/2014/main" id="{0E181115-B95B-063E-A668-018C13FBEE2E}"/>
+              </a:ext>
+            </a:extLst>
+          </p:cNvPr>
+          <p:cNvPicPr>
+            <a:picLocks noChangeAspect="1"/>
+          </p:cNvPicPr>
+          <p:nvPr/>
+        </p:nvPicPr>
+        <p:blipFill>
+          <a:blip r:embed="rId2">
+            <a:extLst>
+              <a:ext uri="{28A0092B-C50C-407E-A947-70E740481C1C}">
+                <a14:useLocalDpi xmlns:a14="http://schemas.microsoft.com/office/drawing/2010/main" val="0"/>
+              </a:ext>
+            </a:extLst>
+          </a:blip>
+          <a:stretch>
+            <a:fillRect/>
+          </a:stretch>
+        </p:blipFill>
+        <p:spPr>
+          <a:xfrm>
+            <a:off x="2022464" y="684346"/>
+            <a:ext cx="8557045" cy="5837192"/>
+          </a:xfrm>
+          <a:prstGeom prst="rect">
+            <a:avLst/>
+          </a:prstGeom>
+        </p:spPr>
+      </p:pic>
+      <p:sp>
+        <p:nvSpPr>
+          <p:cNvPr id="6" name="TextBox 5">
+            <a:extLst>
+              <a:ext uri="{FF2B5EF4-FFF2-40B4-BE49-F238E27FC236}">
+                <a16:creationId xmlns:a16="http://schemas.microsoft.com/office/drawing/2014/main" id="{F4255193-9670-7406-C0CE-48CCE93592BF}"/>
+              </a:ext>
+            </a:extLst>
+          </p:cNvPr>
+          <p:cNvSpPr txBox="1"/>
+          <p:nvPr/>
+        </p:nvSpPr>
+        <p:spPr>
+          <a:xfrm>
+            <a:off x="8272800" y="145737"/>
+            <a:ext cx="979356" cy="538609"/>
+          </a:xfrm>
+          <a:prstGeom prst="rect">
+            <a:avLst/>
+          </a:prstGeom>
+          <a:noFill/>
+        </p:spPr>
+        <p:txBody>
+          <a:bodyPr wrap="square" rtlCol="0">
+            <a:spAutoFit/>
+          </a:bodyPr>
+          <a:lstStyle/>
+          <a:p>
+            <a:r>
+              <a:rPr lang="ru-RU" sz="2900" dirty="0">
+                <a:solidFill>
+                  <a:schemeClr val="tx2"/>
+                </a:solidFill>
+                <a:latin typeface="+mj-lt"/>
+              </a:rPr>
+              <a:t>МЫ</a:t>
+            </a:r>
+          </a:p>
+        </p:txBody>
+      </p:sp>
+    </p:spTree>
+    <p:extLst>
+      <p:ext uri="{BB962C8B-B14F-4D97-AF65-F5344CB8AC3E}">
+        <p14:creationId xmlns:p14="http://schemas.microsoft.com/office/powerpoint/2010/main" val="331481969"/>
+      </p:ext>
+    </p:extLst>
+  </p:cSld>
+  <p:clrMapOvr>
+    <a:masterClrMapping/>
+  </p:clrMapOvr>
+</p:sld>
+</file>
+
+<file path=ppt/slides/slide19.xml><?xml version="1.0" encoding="utf-8"?>
+<p:sld xmlns:a="http://schemas.openxmlformats.org/drawingml/2006/main" xmlns:r="http://schemas.openxmlformats.org/officeDocument/2006/relationships" xmlns:p="http://schemas.openxmlformats.org/presentationml/2006/main">
+  <p:cSld>
+    <p:spTree>
+      <p:nvGrpSpPr>
+        <p:cNvPr id="1" name=""/>
+        <p:cNvGrpSpPr/>
+        <p:nvPr/>
+      </p:nvGrpSpPr>
+      <p:grpSpPr>
+        <a:xfrm>
+          <a:off x="0" y="0"/>
+          <a:ext cx="0" cy="0"/>
+          <a:chOff x="0" y="0"/>
+          <a:chExt cx="0" cy="0"/>
+        </a:xfrm>
+      </p:grpSpPr>
       <p:sp>
         <p:nvSpPr>
           <p:cNvPr id="4" name="Заголовок 3"/>
@@ -7777,18 +8129,59 @@
             <p:ph type="ctrTitle"/>
           </p:nvPr>
         </p:nvSpPr>
-        <p:spPr/>
+        <p:spPr>
+          <a:xfrm>
+            <a:off x="373626" y="0"/>
+            <a:ext cx="11444748" cy="1359677"/>
+          </a:xfrm>
+        </p:spPr>
         <p:txBody>
           <a:bodyPr/>
           <a:lstStyle/>
           <a:p>
             <a:r>
-              <a:rPr lang="ru-RU" dirty="0"/>
+              <a:rPr lang="ru-RU" sz="7200" dirty="0"/>
               <a:t>Спасибо за внимание</a:t>
             </a:r>
           </a:p>
         </p:txBody>
       </p:sp>
+      <p:pic>
+        <p:nvPicPr>
+          <p:cNvPr id="3" name="Рисунок 2" descr="Изображение выглядит как кот, млекопитающее, домашняя кошка, Мелкие и средние кошки">
+            <a:extLst>
+              <a:ext uri="{FF2B5EF4-FFF2-40B4-BE49-F238E27FC236}">
+                <a16:creationId xmlns:a16="http://schemas.microsoft.com/office/drawing/2014/main" id="{0567A29D-E0FD-BFCF-6C6B-3CAA5145B40D}"/>
+              </a:ext>
+            </a:extLst>
+          </p:cNvPr>
+          <p:cNvPicPr>
+            <a:picLocks noChangeAspect="1"/>
+          </p:cNvPicPr>
+          <p:nvPr/>
+        </p:nvPicPr>
+        <p:blipFill>
+          <a:blip r:embed="rId2">
+            <a:extLst>
+              <a:ext uri="{28A0092B-C50C-407E-A947-70E740481C1C}">
+                <a14:useLocalDpi xmlns:a14="http://schemas.microsoft.com/office/drawing/2010/main" val="0"/>
+              </a:ext>
+            </a:extLst>
+          </a:blip>
+          <a:stretch>
+            <a:fillRect/>
+          </a:stretch>
+        </p:blipFill>
+        <p:spPr>
+          <a:xfrm>
+            <a:off x="2386617" y="1212194"/>
+            <a:ext cx="7418766" cy="5284839"/>
+          </a:xfrm>
+          <a:prstGeom prst="rect">
+            <a:avLst/>
+          </a:prstGeom>
+        </p:spPr>
+      </p:pic>
     </p:spTree>
     <p:extLst>
       <p:ext uri="{BB962C8B-B14F-4D97-AF65-F5344CB8AC3E}">
@@ -8499,7 +8892,7 @@
         </p:nvSpPr>
         <p:spPr>
           <a:xfrm>
-            <a:off x="1251678" y="382385"/>
+            <a:off x="1082644" y="136578"/>
             <a:ext cx="10178322" cy="577735"/>
           </a:xfrm>
         </p:spPr>
@@ -8541,8 +8934,8 @@
         </p:blipFill>
         <p:spPr>
           <a:xfrm>
-            <a:off x="2788130" y="960120"/>
-            <a:ext cx="6767350" cy="5311948"/>
+            <a:off x="2876621" y="871630"/>
+            <a:ext cx="6767350" cy="5666822"/>
           </a:xfrm>
         </p:spPr>
       </p:pic>
@@ -8826,8 +9219,8 @@
         </p:blipFill>
         <p:spPr>
           <a:xfrm>
-            <a:off x="2512126" y="1300479"/>
-            <a:ext cx="7556433" cy="5145471"/>
+            <a:off x="2562622" y="1140541"/>
+            <a:ext cx="7556433" cy="5574891"/>
           </a:xfrm>
           <a:prstGeom prst="rect">
             <a:avLst/>
